--- a/courses/build/teach-the-teachers/T-D5.zu.pptx
+++ b/courses/build/teach-the-teachers/T-D5.zu.pptx
@@ -4804,7 +4804,7 @@
                 </a:solidFill>
                 <a:latin typeface="Segoe Print"/>
               </a:rPr>
-              <a:t>Day 5</a:t>
+              <a:t>Usuku 5</a:t>
             </a:r>
           </a:p>
         </p:txBody>
@@ -4887,7 +4887,7 @@
                 </a:solidFill>
                 <a:latin typeface="Trebuchet MS"/>
               </a:rPr>
-              <a:t>Ready to teach</a:t>
+              <a:t>Silungele ukufundisa</a:t>
             </a:r>
           </a:p>
           <a:p>
@@ -4903,7 +4903,7 @@
                 </a:solidFill>
                 <a:latin typeface="Trebuchet MS"/>
               </a:rPr>
-              <a:t>Day 5 of 5</a:t>
+              <a:t>Usuku 5 kwezi-5</a:t>
             </a:r>
           </a:p>
         </p:txBody>
@@ -5209,7 +5209,7 @@
                 </a:solidFill>
                 <a:latin typeface="Segoe Print"/>
               </a:rPr>
-              <a:t>Three ways to check</a:t>
+              <a:t>Izindlela ezintathu zokuhlola</a:t>
             </a:r>
           </a:p>
         </p:txBody>
@@ -5286,13 +5286,13 @@
               </a:spcAft>
             </a:pPr>
             <a:r>
-              <a:rPr sz="2800" b="0">
+              <a:rPr sz="2400" b="0">
                 <a:solidFill>
                   <a:srgbClr val="1C1C1C"/>
                 </a:solidFill>
                 <a:latin typeface="Trebuchet MS"/>
               </a:rPr>
-              <a:t>•  Watch them do it</a:t>
+              <a:t>•  Babuke bekwenza</a:t>
             </a:r>
           </a:p>
           <a:p>
@@ -5302,13 +5302,13 @@
               </a:spcAft>
             </a:pPr>
             <a:r>
-              <a:rPr sz="2800" b="0">
+              <a:rPr sz="2400" b="0">
                 <a:solidFill>
                   <a:srgbClr val="1C1C1C"/>
                 </a:solidFill>
                 <a:latin typeface="Trebuchet MS"/>
               </a:rPr>
-              <a:t>•  Picture quiz, Day 1 and Day 5</a:t>
+              <a:t>•  Imibuzo ngezithombe, Usuku 1 noSuku 5</a:t>
             </a:r>
           </a:p>
           <a:p>
@@ -5318,13 +5318,13 @@
               </a:spcAft>
             </a:pPr>
             <a:r>
-              <a:rPr sz="2800" b="0">
+              <a:rPr sz="2400" b="0">
                 <a:solidFill>
                   <a:srgbClr val="1C1C1C"/>
                 </a:solidFill>
                 <a:latin typeface="Trebuchet MS"/>
               </a:rPr>
-              <a:t>•  Ask them: fingers and stickers</a:t>
+              <a:t>•  Babuze: iminwe nama-sticker</a:t>
             </a:r>
           </a:p>
         </p:txBody>
@@ -5713,7 +5713,7 @@
                 </a:solidFill>
                 <a:latin typeface="Segoe Print"/>
               </a:rPr>
-              <a:t>The flip folder</a:t>
+              <a:t>I-flip folder</a:t>
             </a:r>
           </a:p>
         </p:txBody>
@@ -5790,13 +5790,13 @@
               </a:spcAft>
             </a:pPr>
             <a:r>
-              <a:rPr sz="3000" b="1">
+              <a:rPr sz="2600" b="1">
                 <a:solidFill>
                   <a:srgbClr val="1C1C1C"/>
                 </a:solidFill>
                 <a:latin typeface="Trebuchet MS"/>
               </a:rPr>
-              <a:t>•  Eight forms, in order</a:t>
+              <a:t>•  Amafomu ayisishiyagalombili, ngokulandelana</a:t>
             </a:r>
           </a:p>
           <a:p>
@@ -5806,13 +5806,13 @@
               </a:spcAft>
             </a:pPr>
             <a:r>
-              <a:rPr sz="3000" b="1">
+              <a:rPr sz="2600" b="1">
                 <a:solidFill>
                   <a:srgbClr val="1C1C1C"/>
                 </a:solidFill>
                 <a:latin typeface="Trebuchet MS"/>
               </a:rPr>
-              <a:t>•  When is each one used?</a:t>
+              <a:t>•  Ifomu ngalinye lisetshenziswa nini?</a:t>
             </a:r>
           </a:p>
         </p:txBody>
@@ -6118,7 +6118,7 @@
                 </a:solidFill>
                 <a:latin typeface="Segoe Print"/>
               </a:rPr>
-              <a:t>Look how far you came</a:t>
+              <a:t>Bhekani ukuthi nifike kude kangakanani</a:t>
             </a:r>
           </a:p>
         </p:txBody>
@@ -6195,13 +6195,13 @@
               </a:spcAft>
             </a:pPr>
             <a:r>
-              <a:rPr sz="2800" b="0">
+              <a:rPr sz="2400" b="0">
                 <a:solidFill>
                   <a:srgbClr val="1C1C1C"/>
                 </a:solidFill>
                 <a:latin typeface="Trebuchet MS"/>
               </a:rPr>
-              <a:t>•  Talk %: Round 2 to Round 5</a:t>
+              <a:t>•  I-% yokukhuluma: Round 2 kuya ku-Round 5</a:t>
             </a:r>
           </a:p>
         </p:txBody>
@@ -6507,7 +6507,7 @@
                 </a:solidFill>
                 <a:latin typeface="Segoe Print"/>
               </a:rPr>
-              <a:t>Keep the teacher strong</a:t>
+              <a:t>Gcina uthisha eqinile</a:t>
             </a:r>
           </a:p>
         </p:txBody>
@@ -6590,7 +6590,7 @@
                 </a:solidFill>
                 <a:latin typeface="Trebuchet MS"/>
               </a:rPr>
-              <a:t>•  Three courses, then rest</a:t>
+              <a:t>•  Izifundo ezintathu, bese uphumula</a:t>
             </a:r>
           </a:p>
           <a:p>
@@ -6606,7 +6606,7 @@
                 </a:solidFill>
                 <a:latin typeface="Trebuchet MS"/>
               </a:rPr>
-              <a:t>•  Day 0 always, save your voice</a:t>
+              <a:t>•  Usuku 0 njalo, londoloza izwi lakho</a:t>
             </a:r>
           </a:p>
           <a:p>
@@ -6622,7 +6622,7 @@
                 </a:solidFill>
                 <a:latin typeface="Trebuchet MS"/>
               </a:rPr>
-              <a:t>•  Evening buddy, listen then refer</a:t>
+              <a:t>•  Umngane wakusihlwa, lalela bese udlulisela</a:t>
             </a:r>
           </a:p>
         </p:txBody>
@@ -7011,7 +7011,7 @@
                 </a:solidFill>
                 <a:latin typeface="Segoe Print"/>
               </a:rPr>
-              <a:t>My teaching plan</a:t>
+              <a:t>Uhlelo lwami lokufundisa</a:t>
             </a:r>
           </a:p>
         </p:txBody>
@@ -7088,13 +7088,13 @@
               </a:spcAft>
             </a:pPr>
             <a:r>
-              <a:rPr sz="3000" b="1">
+              <a:rPr sz="2600" b="1">
                 <a:solidFill>
                   <a:srgbClr val="1C1C1C"/>
                 </a:solidFill>
                 <a:latin typeface="Trebuchet MS"/>
               </a:rPr>
-              <a:t>•  My first course, my sessions</a:t>
+              <a:t>•  Isifundo sami sokuqala, izikhathi zami</a:t>
             </a:r>
           </a:p>
           <a:p>
@@ -7104,13 +7104,13 @@
               </a:spcAft>
             </a:pPr>
             <a:r>
-              <a:rPr sz="3000" b="1">
+              <a:rPr sz="2600" b="1">
                 <a:solidFill>
                   <a:srgbClr val="1C1C1C"/>
                 </a:solidFill>
                 <a:latin typeface="Trebuchet MS"/>
               </a:rPr>
-              <a:t>•  Two strengths, one growth area</a:t>
+              <a:t>•  Amandla amabili, into eyodwa yokukhula</a:t>
             </a:r>
           </a:p>
           <a:p>
@@ -7120,13 +7120,13 @@
               </a:spcAft>
             </a:pPr>
             <a:r>
-              <a:rPr sz="3000" b="1">
+              <a:rPr sz="2600" b="1">
                 <a:solidFill>
                   <a:srgbClr val="1C1C1C"/>
                 </a:solidFill>
                 <a:latin typeface="Trebuchet MS"/>
               </a:rPr>
-              <a:t>•  Observed again within 8 weeks</a:t>
+              <a:t>•  Ngizobukwa futhi phakathi kwamaviki angu-8</a:t>
             </a:r>
           </a:p>
         </p:txBody>
@@ -7515,7 +7515,7 @@
                 </a:solidFill>
                 <a:latin typeface="Segoe Print"/>
               </a:rPr>
-              <a:t>Your evaluation</a:t>
+              <a:t>Ukuhlola kwenu</a:t>
             </a:r>
           </a:p>
         </p:txBody>
@@ -7592,13 +7592,13 @@
               </a:spcAft>
             </a:pPr>
             <a:r>
-              <a:rPr sz="3000" b="1">
+              <a:rPr sz="2600" b="1">
                 <a:solidFill>
                   <a:srgbClr val="1C1C1C"/>
                 </a:solidFill>
                 <a:latin typeface="Trebuchet MS"/>
               </a:rPr>
-              <a:t>•  Fingers 1 to 5</a:t>
+              <a:t>•  Iminwe 1 kuya ku-5</a:t>
             </a:r>
           </a:p>
           <a:p>
@@ -7608,13 +7608,13 @@
               </a:spcAft>
             </a:pPr>
             <a:r>
-              <a:rPr sz="3000" b="1">
+              <a:rPr sz="2600" b="1">
                 <a:solidFill>
                   <a:srgbClr val="1C1C1C"/>
                 </a:solidFill>
                 <a:latin typeface="Trebuchet MS"/>
               </a:rPr>
-              <a:t>•  Two stickers on each list</a:t>
+              <a:t>•  Ama-sticker amabili ohlwini ngalunye</a:t>
             </a:r>
           </a:p>
         </p:txBody>
@@ -7920,7 +7920,7 @@
                 </a:solidFill>
                 <a:latin typeface="Segoe Print"/>
               </a:rPr>
-              <a:t>Well done, teachers</a:t>
+              <a:t>Kuhle kakhulu, bothisha</a:t>
             </a:r>
           </a:p>
         </p:txBody>
@@ -8003,7 +8003,7 @@
                 </a:solidFill>
                 <a:latin typeface="Trebuchet MS"/>
               </a:rPr>
-              <a:t>Certificate of attendance</a:t>
+              <a:t>Isitifiketi sokuba khona</a:t>
             </a:r>
           </a:p>
           <a:p>
@@ -8019,7 +8019,7 @@
                 </a:solidFill>
                 <a:latin typeface="Trebuchet MS"/>
               </a:rPr>
-              <a:t>Your first farmers are waiting</a:t>
+              <a:t>Abalimi benu bokuqala bayanilinda</a:t>
             </a:r>
           </a:p>
         </p:txBody>
@@ -8325,7 +8325,7 @@
                 </a:solidFill>
                 <a:latin typeface="Segoe Print"/>
               </a:rPr>
-              <a:t>Fill the plate</a:t>
+              <a:t>Gcwalisa ipuleti</a:t>
             </a:r>
           </a:p>
         </p:txBody>
@@ -8402,13 +8402,13 @@
               </a:spcAft>
             </a:pPr>
             <a:r>
-              <a:rPr sz="2800" b="0">
+              <a:rPr sz="2400" b="0">
                 <a:solidFill>
                   <a:srgbClr val="1C1C1C"/>
                 </a:solidFill>
                 <a:latin typeface="Trebuchet MS"/>
               </a:rPr>
-              <a:t>•  Fill a child's plate for a day</a:t>
+              <a:t>•  Gcwalisa ipuleti lengane losuku lonke</a:t>
             </a:r>
           </a:p>
           <a:p>
@@ -8418,13 +8418,13 @@
               </a:spcAft>
             </a:pPr>
             <a:r>
-              <a:rPr sz="2800" b="0">
+              <a:rPr sz="2400" b="0">
                 <a:solidFill>
                   <a:srgbClr val="1C1C1C"/>
                 </a:solidFill>
                 <a:latin typeface="Trebuchet MS"/>
               </a:rPr>
-              <a:t>•  What's missing?</a:t>
+              <a:t>•  Yini engekho?</a:t>
             </a:r>
           </a:p>
         </p:txBody>
@@ -8813,7 +8813,7 @@
                 </a:solidFill>
                 <a:latin typeface="Segoe Print"/>
               </a:rPr>
-              <a:t>Beans and tins</a:t>
+              <a:t>Ubhontshisi namathini</a:t>
             </a:r>
           </a:p>
         </p:txBody>
@@ -8890,13 +8890,13 @@
               </a:spcAft>
             </a:pPr>
             <a:r>
-              <a:rPr sz="3000" b="1">
+              <a:rPr sz="2600" b="1">
                 <a:solidFill>
                   <a:srgbClr val="1C1C1C"/>
                 </a:solidFill>
                 <a:latin typeface="Trebuchet MS"/>
               </a:rPr>
-              <a:t>•  One bean = R5</a:t>
+              <a:t>•  Ubhontshisi owodwa = R5</a:t>
             </a:r>
           </a:p>
           <a:p>
@@ -8906,13 +8906,13 @@
               </a:spcAft>
             </a:pPr>
             <a:r>
-              <a:rPr sz="3000" b="1">
+              <a:rPr sz="2600" b="1">
                 <a:solidFill>
                   <a:srgbClr val="1C1C1C"/>
                 </a:solidFill>
                 <a:latin typeface="Trebuchet MS"/>
               </a:rPr>
-              <a:t>•  Move beans for each event</a:t>
+              <a:t>•  Hambisani ubhontshisi esenzakalweni ngasinye</a:t>
             </a:r>
           </a:p>
           <a:p>
@@ -8922,13 +8922,13 @@
               </a:spcAft>
             </a:pPr>
             <a:r>
-              <a:rPr sz="3000" b="1">
+              <a:rPr sz="2600" b="1">
                 <a:solidFill>
                   <a:srgbClr val="1C1C1C"/>
                 </a:solidFill>
                 <a:latin typeface="Trebuchet MS"/>
               </a:rPr>
-              <a:t>•  Draw it in the money book</a:t>
+              <a:t>•  Kudwebeni encwadini yemali</a:t>
             </a:r>
           </a:p>
         </p:txBody>
@@ -9234,7 +9234,7 @@
                 </a:solidFill>
                 <a:latin typeface="Segoe Print"/>
               </a:rPr>
-              <a:t>Numbers without reading</a:t>
+              <a:t>Izinombolo ngaphandle kokufunda</a:t>
             </a:r>
           </a:p>
         </p:txBody>
@@ -9311,13 +9311,13 @@
               </a:spcAft>
             </a:pPr>
             <a:r>
-              <a:rPr sz="2800" b="0">
+              <a:rPr sz="2400" b="0">
                 <a:solidFill>
                   <a:srgbClr val="1C1C1C"/>
                 </a:solidFill>
                 <a:latin typeface="Trebuchet MS"/>
               </a:rPr>
-              <a:t>•  Beans, tins, picture cards</a:t>
+              <a:t>•  Ubhontshisi, amathini, amakhadi ezithombe</a:t>
             </a:r>
           </a:p>
           <a:p>
@@ -9327,13 +9327,13 @@
               </a:spcAft>
             </a:pPr>
             <a:r>
-              <a:rPr sz="2800" b="0">
+              <a:rPr sz="2400" b="0">
                 <a:solidFill>
                   <a:srgbClr val="1C1C1C"/>
                 </a:solidFill>
                 <a:latin typeface="Trebuchet MS"/>
               </a:rPr>
-              <a:t>•  One event at a time</a:t>
+              <a:t>•  Isenzakalo esisodwa ngesikhathi</a:t>
             </a:r>
           </a:p>
           <a:p>
@@ -9343,13 +9343,13 @@
               </a:spcAft>
             </a:pPr>
             <a:r>
-              <a:rPr sz="2800" b="0">
+              <a:rPr sz="2400" b="0">
                 <a:solidFill>
                   <a:srgbClr val="1C1C1C"/>
                 </a:solidFill>
                 <a:latin typeface="Trebuchet MS"/>
               </a:rPr>
-              <a:t>•  Groups check each other</a:t>
+              <a:t>•  Amaqembu ayahlolana</a:t>
             </a:r>
           </a:p>
         </p:txBody>
@@ -9599,7 +9599,7 @@
                 </a:solidFill>
                 <a:latin typeface="Segoe Print"/>
               </a:rPr>
-              <a:t>Final teaching practice</a:t>
+              <a:t>Ukuzilolonga kokugcina ukufundisa</a:t>
             </a:r>
           </a:p>
         </p:txBody>
@@ -9682,7 +9682,7 @@
                 </a:solidFill>
                 <a:latin typeface="Trebuchet MS"/>
               </a:rPr>
-              <a:t>30 minutes, pairs</a:t>
+              <a:t>Imizuzu 30, ngababili</a:t>
             </a:r>
           </a:p>
           <a:p>
@@ -9698,7 +9698,7 @@
                 </a:solidFill>
                 <a:latin typeface="Trebuchet MS"/>
               </a:rPr>
-              <a:t>A real Course 1 session</a:t>
+              <a:t>Isifundo sangempela se-Course 1</a:t>
             </a:r>
           </a:p>
         </p:txBody>
@@ -10087,7 +10087,7 @@
                 </a:solidFill>
                 <a:latin typeface="Segoe Print"/>
               </a:rPr>
-              <a:t>We are your farmers</a:t>
+              <a:t>Thina singabalimi benu</a:t>
             </a:r>
           </a:p>
         </p:txBody>
@@ -10164,13 +10164,13 @@
               </a:spcAft>
             </a:pPr>
             <a:r>
-              <a:rPr sz="3000" b="1">
+              <a:rPr sz="2600" b="1">
                 <a:solidFill>
                   <a:srgbClr val="1C1C1C"/>
                 </a:solidFill>
                 <a:latin typeface="Trebuchet MS"/>
               </a:rPr>
-              <a:t>•  Your hand-made poster up</a:t>
+              <a:t>•  Iphosta yenu eniyenze ngezandla ilengisiwe</a:t>
             </a:r>
           </a:p>
           <a:p>
@@ -10180,13 +10180,13 @@
               </a:spcAft>
             </a:pPr>
             <a:r>
-              <a:rPr sz="3000" b="1">
+              <a:rPr sz="2600" b="1">
                 <a:solidFill>
                   <a:srgbClr val="1C1C1C"/>
                 </a:solidFill>
                 <a:latin typeface="Trebuchet MS"/>
               </a:rPr>
-              <a:t>•  Practical in two groups of 4</a:t>
+              <a:t>•  Umsebenzi wezandla ngamaqembu amabili aba-4</a:t>
             </a:r>
           </a:p>
           <a:p>
@@ -10196,13 +10196,13 @@
               </a:spcAft>
             </a:pPr>
             <a:r>
-              <a:rPr sz="3000" b="1">
+              <a:rPr sz="2600" b="1">
                 <a:solidFill>
                   <a:srgbClr val="1C1C1C"/>
                 </a:solidFill>
                 <a:latin typeface="Trebuchet MS"/>
               </a:rPr>
-              <a:t>•  Expect real questions</a:t>
+              <a:t>•  Lindelani imibuzo yangempela</a:t>
             </a:r>
           </a:p>
         </p:txBody>
@@ -10508,7 +10508,7 @@
                 </a:solidFill>
                 <a:latin typeface="Segoe Print"/>
               </a:rPr>
-              <a:t>Feedback: 10 minutes</a:t>
+              <a:t>Impendulo: imizuzu 10</a:t>
             </a:r>
           </a:p>
         </p:txBody>
@@ -10585,13 +10585,13 @@
               </a:spcAft>
             </a:pPr>
             <a:r>
-              <a:rPr sz="2800" b="0">
+              <a:rPr sz="2400" b="0">
                 <a:solidFill>
                   <a:srgbClr val="1C1C1C"/>
                 </a:solidFill>
                 <a:latin typeface="Trebuchet MS"/>
               </a:rPr>
-              <a:t>•  Partners star each other</a:t>
+              <a:t>•  Abangane banikana izinkanyezi</a:t>
             </a:r>
           </a:p>
           <a:p>
@@ -10601,13 +10601,13 @@
               </a:spcAft>
             </a:pPr>
             <a:r>
-              <a:rPr sz="2800" b="0">
+              <a:rPr sz="2400" b="0">
                 <a:solidFill>
                   <a:srgbClr val="1C1C1C"/>
                 </a:solidFill>
                 <a:latin typeface="Trebuchet MS"/>
               </a:rPr>
-              <a:t>•  Observers: numbers and stars</a:t>
+              <a:t>•  Ababukeli: izinombolo nezinkanyezi</a:t>
             </a:r>
           </a:p>
           <a:p>
@@ -10617,13 +10617,13 @@
               </a:spcAft>
             </a:pPr>
             <a:r>
-              <a:rPr sz="2800" b="0">
+              <a:rPr sz="2400" b="0">
                 <a:solidFill>
                   <a:srgbClr val="1C1C1C"/>
                 </a:solidFill>
                 <a:latin typeface="Trebuchet MS"/>
               </a:rPr>
-              <a:t>•  Trainer: two stars and a wish</a:t>
+              <a:t>•  Umqeqeshi: izinkanyezi ezimbili nesifiso</a:t>
             </a:r>
           </a:p>
         </p:txBody>
@@ -10929,7 +10929,7 @@
                 </a:solidFill>
                 <a:latin typeface="Segoe Print"/>
               </a:rPr>
-              <a:t>Did they learn it?</a:t>
+              <a:t>Ingabe bakufundile?</a:t>
             </a:r>
           </a:p>
         </p:txBody>
@@ -11012,7 +11012,7 @@
                 </a:solidFill>
                 <a:latin typeface="Trebuchet MS"/>
               </a:rPr>
-              <a:t>Watch · Quiz · Ask</a:t>
+              <a:t>Buka · Imibuzo ngezithombe · Buza</a:t>
             </a:r>
           </a:p>
         </p:txBody>
@@ -11401,7 +11401,7 @@
                 </a:solidFill>
                 <a:latin typeface="Segoe Print"/>
               </a:rPr>
-              <a:t>Picture quiz</a:t>
+              <a:t>Imibuzo ngezithombe</a:t>
             </a:r>
           </a:p>
         </p:txBody>
@@ -11478,13 +11478,13 @@
               </a:spcAft>
             </a:pPr>
             <a:r>
-              <a:rPr sz="3000" b="1">
+              <a:rPr sz="2600" b="1">
                 <a:solidFill>
                   <a:srgbClr val="1C1C1C"/>
                 </a:solidFill>
                 <a:latin typeface="Trebuchet MS"/>
               </a:rPr>
-              <a:t>•  Walk to corner A, B or C</a:t>
+              <a:t>•  Hambani niye ekhoneni A, B noma C</a:t>
             </a:r>
           </a:p>
           <a:p>
@@ -11494,13 +11494,13 @@
               </a:spcAft>
             </a:pPr>
             <a:r>
-              <a:rPr sz="3000" b="1">
+              <a:rPr sz="2600" b="1">
                 <a:solidFill>
                   <a:srgbClr val="1C1C1C"/>
                 </a:solidFill>
                 <a:latin typeface="Trebuchet MS"/>
               </a:rPr>
-              <a:t>•  Count heads, not names</a:t>
+              <a:t>•  Balani amakhanda, hhayi amagama</a:t>
             </a:r>
           </a:p>
         </p:txBody>

--- a/courses/build/teach-the-teachers/T-D5.zu.pptx
+++ b/courses/build/teach-the-teachers/T-D5.zu.pptx
@@ -1298,7 +1298,7 @@
           </a:p>
           <a:p>
             <a:r>
-              <a:t>Clip T-ANI-23: public/course-animations/market-community/watch-04-farm-record.mp4</a:t>
+              <a:t>Clip T-ANI-23: public/course-media/teach-the-teachers/T-ANI-23.mp4</a:t>
             </a:r>
           </a:p>
         </p:txBody>
@@ -9354,49 +9354,27 @@
           </a:p>
         </p:txBody>
       </p:sp>
-      <p:pic>
-        <p:nvPicPr>
-          <p:cNvPr id="7" name="Picture 6" descr="watch-04-farm-record.jpg"/>
-          <p:cNvPicPr>
-            <a:picLocks noChangeAspect="1"/>
-          </p:cNvPicPr>
-          <p:nvPr/>
-        </p:nvPicPr>
-        <p:blipFill>
-          <a:blip r:embed="rId2"/>
-          <a:stretch>
-            <a:fillRect/>
-          </a:stretch>
-        </p:blipFill>
-        <p:spPr>
-          <a:xfrm>
-            <a:off x="5852160" y="2308860"/>
-            <a:ext cx="5852160" cy="3291840"/>
-          </a:xfrm>
-          <a:prstGeom prst="rect">
-            <a:avLst/>
-          </a:prstGeom>
-        </p:spPr>
-      </p:pic>
-      <p:sp>
-        <p:nvSpPr>
-          <p:cNvPr id="8" name="Rectangle 7"/>
+      <p:sp>
+        <p:nvSpPr>
+          <p:cNvPr id="7" name="Rectangle 6"/>
           <p:cNvSpPr/>
           <p:nvPr/>
         </p:nvSpPr>
         <p:spPr>
           <a:xfrm>
-            <a:off x="5852160" y="5806440"/>
-            <a:ext cx="5852160" cy="411480"/>
+            <a:off x="5852160" y="1691640"/>
+            <a:ext cx="5852160" cy="4526280"/>
           </a:xfrm>
           <a:prstGeom prst="rect">
             <a:avLst/>
           </a:prstGeom>
           <a:solidFill>
-            <a:srgbClr val="1C1C1C"/>
+            <a:srgbClr val="C9A77C"/>
           </a:solidFill>
-          <a:ln>
-            <a:noFill/>
+          <a:ln w="15875">
+            <a:solidFill>
+              <a:srgbClr val="2C6FB7"/>
+            </a:solidFill>
           </a:ln>
           <a:effectLst/>
         </p:spPr>
@@ -9424,14 +9402,53 @@
       </p:sp>
       <p:sp>
         <p:nvSpPr>
+          <p:cNvPr id="8" name="TextBox 7"/>
+          <p:cNvSpPr txBox="1"/>
+          <p:nvPr/>
+        </p:nvSpPr>
+        <p:spPr>
+          <a:xfrm>
+            <a:off x="6080760" y="1874520"/>
+            <a:ext cx="5394960" cy="365760"/>
+          </a:xfrm>
+          <a:prstGeom prst="rect">
+            <a:avLst/>
+          </a:prstGeom>
+          <a:noFill/>
+        </p:spPr>
+        <p:txBody>
+          <a:bodyPr wrap="square" anchor="t" lIns="45720" rIns="45720">
+            <a:spAutoFit/>
+          </a:bodyPr>
+          <a:lstStyle/>
+          <a:p>
+            <a:pPr algn="l">
+              <a:spcAft>
+                <a:spcPts val="800"/>
+              </a:spcAft>
+            </a:pPr>
+            <a:r>
+              <a:rPr sz="1200" b="1">
+                <a:solidFill>
+                  <a:srgbClr val="D2452C"/>
+                </a:solidFill>
+                <a:latin typeface="Trebuchet MS"/>
+              </a:rPr>
+              <a:t>ANIMATION · T-ANI-23 · coming</a:t>
+            </a:r>
+          </a:p>
+        </p:txBody>
+      </p:sp>
+      <p:sp>
+        <p:nvSpPr>
           <p:cNvPr id="9" name="TextBox 8"/>
           <p:cNvSpPr txBox="1"/>
           <p:nvPr/>
         </p:nvSpPr>
         <p:spPr>
           <a:xfrm>
-            <a:off x="5943600" y="5815584"/>
-            <a:ext cx="5669280" cy="384048"/>
+            <a:off x="6080760" y="2258568"/>
+            <a:ext cx="5394960" cy="457200"/>
           </a:xfrm>
           <a:prstGeom prst="rect">
             <a:avLst/>
@@ -9439,7 +9456,7 @@
           <a:noFill/>
         </p:spPr>
         <p:txBody>
-          <a:bodyPr wrap="square" anchor="ctr" lIns="45720" rIns="45720">
+          <a:bodyPr wrap="square" anchor="t" lIns="45720" rIns="45720">
             <a:spAutoFit/>
           </a:bodyPr>
           <a:lstStyle/>
@@ -9450,13 +9467,52 @@
               </a:spcAft>
             </a:pPr>
             <a:r>
+              <a:rPr sz="1800" b="1">
+                <a:solidFill>
+                  <a:srgbClr val="1C1C1C"/>
+                </a:solidFill>
+                <a:latin typeface="Segoe Print"/>
+              </a:rPr>
+              <a:t>The farm record</a:t>
+            </a:r>
+          </a:p>
+        </p:txBody>
+      </p:sp>
+      <p:sp>
+        <p:nvSpPr>
+          <p:cNvPr id="10" name="TextBox 9"/>
+          <p:cNvSpPr txBox="1"/>
+          <p:nvPr/>
+        </p:nvSpPr>
+        <p:spPr>
+          <a:xfrm>
+            <a:off x="6080760" y="2788920"/>
+            <a:ext cx="5394960" cy="3246120"/>
+          </a:xfrm>
+          <a:prstGeom prst="rect">
+            <a:avLst/>
+          </a:prstGeom>
+          <a:noFill/>
+        </p:spPr>
+        <p:txBody>
+          <a:bodyPr wrap="square" anchor="t" lIns="45720" rIns="45720">
+            <a:spAutoFit/>
+          </a:bodyPr>
+          <a:lstStyle/>
+          <a:p>
+            <a:pPr algn="l">
+              <a:spcAft>
+                <a:spcPts val="800"/>
+              </a:spcAft>
+            </a:pPr>
+            <a:r>
               <a:rPr sz="1100" b="0">
                 <a:solidFill>
-                  <a:srgbClr val="C9A77C"/>
+                  <a:srgbClr val="1C1C1C"/>
                 </a:solidFill>
                 <a:latin typeface="Trebuchet MS"/>
               </a:rPr>
-              <a:t>▶  Clip T-ANI-23 · play from the tablet: watch-04-farm-record.mp4</a:t>
+              <a:t>A hand makes tally marks in two columns of a simple exercise book beside a basket of harvested greens and a hanging scale; bunches move from the basket into three piles (eat, share, sell) as marks appear. Marks are simple strokes, never readable writing. (Replaces the withdrawn clip `market-community/watch-04-farm-record.mp4`.)</a:t>
             </a:r>
           </a:p>
         </p:txBody>
